--- a/exports/pptx/lessons/middle-module-01-what-is-iks/day-05-mid-module.pptx
+++ b/exports/pptx/lessons/middle-module-01-what-is-iks/day-05-mid-module.pptx
@@ -17,9 +17,11 @@
     <p:sldId id="265" r:id="rId11"/>
     <p:sldId id="266" r:id="rId12"/>
     <p:sldId id="267" r:id="rId13"/>
+    <p:sldId id="268" r:id="rId14"/>
+    <p:sldId id="269" r:id="rId15"/>
   </p:sldIdLst>
   <p:notesMasterIdLst>
-    <p:notesMasterId r:id="rId14"/>
+    <p:notesMasterId r:id="rId16"/>
   </p:notesMasterIdLst>
   <p:sldSz cx="9144000" cy="5143500"/>
   <p:notesSz cx="5143500" cy="9144000"/>
@@ -801,6 +803,182 @@
             <a:fld id="{F7021451-1387-4CA6-816F-3879F97B5CBC}" type="slidenum">
               <a:rPr lang="en-US"/>
               <a:t>12</a:t>
+            </a:fld>
+            <a:endParaRPr lang="en-US"/>
+          </a:p>
+        </p:txBody>
+      </p:sp>
+    </p:spTree>
+    <p:extLst>
+      <p:ext uri="{BB962C8B-B14F-4D97-AF65-F5344CB8AC3E}">
+        <p14:creationId xmlns:p14="http://schemas.microsoft.com/office/powerpoint/2010/main" val="1024086991"/>
+      </p:ext>
+    </p:extLst>
+  </p:cSld>
+  <p:clrMapOvr>
+    <a:masterClrMapping/>
+  </p:clrMapOvr>
+</p:notes>
+</file>
+
+<file path=ppt/notesSlides/notesSlide13.xml><?xml version="1.0" encoding="utf-8"?>
+<p:notes xmlns:a="http://schemas.openxmlformats.org/drawingml/2006/main" xmlns:r="http://schemas.openxmlformats.org/officeDocument/2006/relationships" xmlns:p="http://schemas.openxmlformats.org/presentationml/2006/main">
+  <p:cSld>
+    <p:spTree>
+      <p:nvGrpSpPr>
+        <p:cNvPr id="1" name=""/>
+        <p:cNvGrpSpPr/>
+        <p:nvPr/>
+      </p:nvGrpSpPr>
+      <p:grpSpPr>
+        <a:xfrm>
+          <a:off x="0" y="0"/>
+          <a:ext cx="0" cy="0"/>
+          <a:chOff x="0" y="0"/>
+          <a:chExt cx="0" cy="0"/>
+        </a:xfrm>
+      </p:grpSpPr>
+      <p:sp>
+        <p:nvSpPr>
+          <p:cNvPr id="2" name="Slide Image Placeholder 1"/>
+          <p:cNvSpPr>
+            <a:spLocks noGrp="1" noRot="1" noChangeAspect="1"/>
+          </p:cNvSpPr>
+          <p:nvPr>
+            <p:ph type="sldImg"/>
+          </p:nvPr>
+        </p:nvSpPr>
+        <p:spPr/>
+      </p:sp>
+      <p:sp>
+        <p:nvSpPr>
+          <p:cNvPr id="3" name="Notes Placeholder 2"/>
+          <p:cNvSpPr>
+            <a:spLocks noGrp="1"/>
+          </p:cNvSpPr>
+          <p:nvPr>
+            <p:ph type="body" idx="1"/>
+          </p:nvPr>
+        </p:nvSpPr>
+        <p:spPr/>
+        <p:txBody>
+          <a:bodyPr/>
+          <a:lstStyle/>
+          <a:p>
+            <a:r>
+              <a:rPr lang="en-US" dirty="0"/>
+              <a:t/>
+            </a:r>
+            <a:endParaRPr lang="en-US" dirty="0"/>
+          </a:p>
+        </p:txBody>
+      </p:sp>
+      <p:sp>
+        <p:nvSpPr>
+          <p:cNvPr id="4" name="Slide Number Placeholder 3"/>
+          <p:cNvSpPr>
+            <a:spLocks noGrp="1"/>
+          </p:cNvSpPr>
+          <p:nvPr>
+            <p:ph type="sldNum" sz="quarter" idx="10"/>
+          </p:nvPr>
+        </p:nvSpPr>
+        <p:spPr/>
+        <p:txBody>
+          <a:bodyPr/>
+          <a:lstStyle/>
+          <a:p>
+            <a:fld id="{F7021451-1387-4CA6-816F-3879F97B5CBC}" type="slidenum">
+              <a:rPr lang="en-US"/>
+              <a:t>13</a:t>
+            </a:fld>
+            <a:endParaRPr lang="en-US"/>
+          </a:p>
+        </p:txBody>
+      </p:sp>
+    </p:spTree>
+    <p:extLst>
+      <p:ext uri="{BB962C8B-B14F-4D97-AF65-F5344CB8AC3E}">
+        <p14:creationId xmlns:p14="http://schemas.microsoft.com/office/powerpoint/2010/main" val="1024086991"/>
+      </p:ext>
+    </p:extLst>
+  </p:cSld>
+  <p:clrMapOvr>
+    <a:masterClrMapping/>
+  </p:clrMapOvr>
+</p:notes>
+</file>
+
+<file path=ppt/notesSlides/notesSlide14.xml><?xml version="1.0" encoding="utf-8"?>
+<p:notes xmlns:a="http://schemas.openxmlformats.org/drawingml/2006/main" xmlns:r="http://schemas.openxmlformats.org/officeDocument/2006/relationships" xmlns:p="http://schemas.openxmlformats.org/presentationml/2006/main">
+  <p:cSld>
+    <p:spTree>
+      <p:nvGrpSpPr>
+        <p:cNvPr id="1" name=""/>
+        <p:cNvGrpSpPr/>
+        <p:nvPr/>
+      </p:nvGrpSpPr>
+      <p:grpSpPr>
+        <a:xfrm>
+          <a:off x="0" y="0"/>
+          <a:ext cx="0" cy="0"/>
+          <a:chOff x="0" y="0"/>
+          <a:chExt cx="0" cy="0"/>
+        </a:xfrm>
+      </p:grpSpPr>
+      <p:sp>
+        <p:nvSpPr>
+          <p:cNvPr id="2" name="Slide Image Placeholder 1"/>
+          <p:cNvSpPr>
+            <a:spLocks noGrp="1" noRot="1" noChangeAspect="1"/>
+          </p:cNvSpPr>
+          <p:nvPr>
+            <p:ph type="sldImg"/>
+          </p:nvPr>
+        </p:nvSpPr>
+        <p:spPr/>
+      </p:sp>
+      <p:sp>
+        <p:nvSpPr>
+          <p:cNvPr id="3" name="Notes Placeholder 2"/>
+          <p:cNvSpPr>
+            <a:spLocks noGrp="1"/>
+          </p:cNvSpPr>
+          <p:nvPr>
+            <p:ph type="body" idx="1"/>
+          </p:nvPr>
+        </p:nvSpPr>
+        <p:spPr/>
+        <p:txBody>
+          <a:bodyPr/>
+          <a:lstStyle/>
+          <a:p>
+            <a:r>
+              <a:rPr lang="en-US" dirty="0"/>
+              <a:t/>
+            </a:r>
+            <a:endParaRPr lang="en-US" dirty="0"/>
+          </a:p>
+        </p:txBody>
+      </p:sp>
+      <p:sp>
+        <p:nvSpPr>
+          <p:cNvPr id="4" name="Slide Number Placeholder 3"/>
+          <p:cNvSpPr>
+            <a:spLocks noGrp="1"/>
+          </p:cNvSpPr>
+          <p:nvPr>
+            <p:ph type="sldNum" sz="quarter" idx="10"/>
+          </p:nvPr>
+        </p:nvSpPr>
+        <p:spPr/>
+        <p:txBody>
+          <a:bodyPr/>
+          <a:lstStyle/>
+          <a:p>
+            <a:fld id="{F7021451-1387-4CA6-816F-3879F97B5CBC}" type="slidenum">
+              <a:rPr lang="en-US"/>
+              <a:t>14</a:t>
             </a:fld>
             <a:endParaRPr lang="en-US"/>
           </a:p>
@@ -2054,102 +2232,6 @@
         </p:nvSpPr>
         <p:spPr>
           <a:xfrm>
-            <a:off x="406301" y="1223963"/>
-            <a:ext cx="8498026" cy="274290"/>
-          </a:xfrm>
-          <a:prstGeom prst="rect">
-            <a:avLst/>
-          </a:prstGeom>
-          <a:noFill/>
-          <a:ln/>
-        </p:spPr>
-        <p:txBody>
-          <a:bodyPr wrap="square" lIns="0" tIns="0" rIns="0" bIns="0" rtlCol="0" anchor="t"/>
-          <a:lstStyle/>
-          <a:p>
-            <a:pPr algn="l" indent="0" marL="0">
-              <a:lnSpc>
-                <a:spcPts val="2160"/>
-              </a:lnSpc>
-              <a:spcBef>
-                <a:spcPts val="600"/>
-              </a:spcBef>
-              <a:spcAft>
-                <a:spcPts val="800"/>
-              </a:spcAft>
-              <a:buNone/>
-            </a:pPr>
-            <a:r>
-              <a:rPr lang="en-US" sz="1800" b="1" dirty="0">
-                <a:solidFill>
-                  <a:srgbClr val="FE4447"/>
-                </a:solidFill>
-                <a:latin typeface="Georgia" pitchFamily="34" charset="0"/>
-                <a:ea typeface="Georgia" pitchFamily="34" charset="-122"/>
-                <a:cs typeface="Georgia" pitchFamily="34" charset="-120"/>
-              </a:rPr>
-              <a:t>Learning objective</a:t>
-            </a:r>
-            <a:endParaRPr lang="en-US" sz="1800" dirty="0"/>
-          </a:p>
-        </p:txBody>
-      </p:sp>
-      <p:sp>
-        <p:nvSpPr>
-          <p:cNvPr id="6" name="Text 4"/>
-          <p:cNvSpPr/>
-          <p:nvPr/>
-        </p:nvSpPr>
-        <p:spPr>
-          <a:xfrm>
-            <a:off x="406301" y="1637854"/>
-            <a:ext cx="8498026" cy="213271"/>
-          </a:xfrm>
-          <a:prstGeom prst="rect">
-            <a:avLst/>
-          </a:prstGeom>
-          <a:noFill/>
-          <a:ln/>
-        </p:spPr>
-        <p:txBody>
-          <a:bodyPr wrap="square" lIns="0" tIns="0" rIns="0" bIns="0" rtlCol="0" anchor="t"/>
-          <a:lstStyle/>
-          <a:p>
-            <a:pPr algn="l" indent="0" marL="0">
-              <a:lnSpc>
-                <a:spcPts val="1680"/>
-              </a:lnSpc>
-              <a:spcBef>
-                <a:spcPts val="300"/>
-              </a:spcBef>
-              <a:spcAft>
-                <a:spcPts val="300"/>
-              </a:spcAft>
-              <a:buNone/>
-            </a:pPr>
-            <a:r>
-              <a:rPr lang="en-US" sz="1200" dirty="0">
-                <a:solidFill>
-                  <a:srgbClr val="1C2833"/>
-                </a:solidFill>
-                <a:latin typeface="Arial" pitchFamily="34" charset="0"/>
-                <a:ea typeface="Arial" pitchFamily="34" charset="-122"/>
-                <a:cs typeface="Arial" pitchFamily="34" charset="-120"/>
-              </a:rPr>
-              <a:t>Students consolidate Days 1–4 via a formative quiz and commit to a project topic.</a:t>
-            </a:r>
-            <a:endParaRPr lang="en-US" sz="1200" dirty="0"/>
-          </a:p>
-        </p:txBody>
-      </p:sp>
-      <p:sp>
-        <p:nvSpPr>
-          <p:cNvPr id="7" name="Text 5"/>
-          <p:cNvSpPr/>
-          <p:nvPr/>
-        </p:nvSpPr>
-        <p:spPr>
-          <a:xfrm>
             <a:off x="406301" y="4434929"/>
             <a:ext cx="8498026" cy="213271"/>
           </a:xfrm>
@@ -2294,7 +2376,7 @@
                 <a:ea typeface="Georgia" pitchFamily="34" charset="-122"/>
                 <a:cs typeface="Georgia" pitchFamily="34" charset="-120"/>
               </a:rPr>
-              <a:t>Differentiation</a:t>
+              <a:t>Wrap-up (5 min)</a:t>
             </a:r>
             <a:endParaRPr lang="en-US" sz="1800" dirty="0"/>
           </a:p>
@@ -2332,7 +2414,7 @@
               <a:buChar char="•"/>
             </a:pPr>
             <a:r>
-              <a:rPr lang="en-US" sz="1200" b="1" dirty="0">
+              <a:rPr lang="en-US" sz="1200" dirty="0">
                 <a:solidFill>
                   <a:srgbClr val="1C2833"/>
                 </a:solidFill>
@@ -2340,16 +2422,20 @@
                 <a:ea typeface="Arial" pitchFamily="34" charset="-122"/>
                 <a:cs typeface="Arial" pitchFamily="34" charset="-120"/>
               </a:rPr>
-              <a:t>Tier up:</a:t>
-            </a:r>
-            <a:pPr algn="l" indent="0" marL="0">
+              <a:t>Note: "Some domains will have 5+ students, some will have 1. Each will be different. That's fine."</a:t>
+            </a:r>
+            <a:endParaRPr lang="en-US" sz="1200" dirty="0"/>
+          </a:p>
+          <a:p>
+            <a:pPr algn="l" marL="342900" indent="-342900">
               <a:lnSpc>
                 <a:spcPts val="1620"/>
               </a:lnSpc>
               <a:spcAft>
                 <a:spcPts val="300"/>
               </a:spcAft>
-              <a:buNone/>
+              <a:buSzPct val="100000"/>
+              <a:buChar char="•"/>
             </a:pPr>
             <a:r>
               <a:rPr lang="en-US" sz="1200" dirty="0">
@@ -2360,23 +2446,19 @@
                 <a:ea typeface="Arial" pitchFamily="34" charset="-122"/>
                 <a:cs typeface="Arial" pitchFamily="34" charset="-120"/>
               </a:rPr>
-              <a:t> Pick a less common topic (Pāṇini, Mādhava). The research is harder; the project will stand out.</a:t>
-            </a:r>
-            <a:endParaRPr lang="en-US" sz="1200" dirty="0"/>
-          </a:p>
-          <a:p>
-            <a:pPr algn="l" marL="342900" indent="-342900">
+              <a:t>Preview Day 6: </a:t>
+            </a:r>
+            <a:pPr algn="l" indent="0" marL="0">
               <a:lnSpc>
                 <a:spcPts val="1620"/>
               </a:lnSpc>
               <a:spcAft>
                 <a:spcPts val="300"/>
               </a:spcAft>
-              <a:buSzPct val="100000"/>
-              <a:buChar char="•"/>
-            </a:pPr>
-            <a:r>
-              <a:rPr lang="en-US" sz="1200" b="1" dirty="0">
+              <a:buNone/>
+            </a:pPr>
+            <a:r>
+              <a:rPr lang="en-US" sz="1200" i="1" dirty="0">
                 <a:solidFill>
                   <a:srgbClr val="1C2833"/>
                 </a:solidFill>
@@ -2384,27 +2466,7 @@
                 <a:ea typeface="Arial" pitchFamily="34" charset="-122"/>
                 <a:cs typeface="Arial" pitchFamily="34" charset="-120"/>
               </a:rPr>
-              <a:t>Tier down:</a:t>
-            </a:r>
-            <a:pPr algn="l" indent="0" marL="0">
-              <a:lnSpc>
-                <a:spcPts val="1620"/>
-              </a:lnSpc>
-              <a:spcAft>
-                <a:spcPts val="300"/>
-              </a:spcAft>
-              <a:buNone/>
-            </a:pPr>
-            <a:r>
-              <a:rPr lang="en-US" sz="1200" dirty="0">
-                <a:solidFill>
-                  <a:srgbClr val="1C2833"/>
-                </a:solidFill>
-                <a:latin typeface="Arial" pitchFamily="34" charset="0"/>
-                <a:ea typeface="Arial" pitchFamily="34" charset="-122"/>
-                <a:cs typeface="Arial" pitchFamily="34" charset="-120"/>
-              </a:rPr>
-              <a:t> Pick a well-documented topic (zero, Aryabhata, Suśruta). Easier research.</a:t>
+              <a:t>"Tomorrow — deep on Indian mathematics. Zero. Place value. Infinite series."</a:t>
             </a:r>
             <a:endParaRPr lang="en-US" sz="1200" dirty="0"/>
           </a:p>
@@ -2562,7 +2624,7 @@
                 <a:ea typeface="Georgia" pitchFamily="34" charset="-122"/>
                 <a:cs typeface="Georgia" pitchFamily="34" charset="-120"/>
               </a:rPr>
-              <a:t>Teacher notes</a:t>
+              <a:t>Homework</a:t>
             </a:r>
             <a:endParaRPr lang="en-US" sz="1800" dirty="0"/>
           </a:p>
@@ -2576,8 +2638,8 @@
         </p:nvSpPr>
         <p:spPr>
           <a:xfrm>
-            <a:off x="406301" y="870942"/>
-            <a:ext cx="8498026" cy="639812"/>
+            <a:off x="634901" y="883593"/>
+            <a:ext cx="8102798" cy="281880"/>
           </a:xfrm>
           <a:prstGeom prst="rect">
             <a:avLst/>
@@ -2589,17 +2651,15 @@
           <a:bodyPr wrap="square" lIns="0" tIns="0" rIns="0" bIns="0" rtlCol="0" anchor="t"/>
           <a:lstStyle/>
           <a:p>
-            <a:pPr algn="l" indent="0" marL="0">
-              <a:lnSpc>
-                <a:spcPts val="1680"/>
-              </a:lnSpc>
-              <a:spcBef>
-                <a:spcPts val="300"/>
-              </a:spcBef>
-              <a:spcAft>
-                <a:spcPts val="300"/>
-              </a:spcAft>
-              <a:buNone/>
+            <a:pPr algn="l" marL="342900" indent="-342900">
+              <a:lnSpc>
+                <a:spcPts val="1620"/>
+              </a:lnSpc>
+              <a:spcAft>
+                <a:spcPts val="300"/>
+              </a:spcAft>
+              <a:buSzPct val="100000"/>
+              <a:buChar char="•"/>
             </a:pPr>
             <a:r>
               <a:rPr lang="en-US" sz="1200" dirty="0">
@@ -2610,7 +2670,7 @@
                 <a:ea typeface="Arial" pitchFamily="34" charset="-122"/>
                 <a:cs typeface="Arial" pitchFamily="34" charset="-120"/>
               </a:rPr>
-              <a:t>– Mark the formative quiz tonight. Note any student who scored below 50% — schedule a 10-min check-in by Day 7. – The project topic choice often surfaces what students are curious about. Adjust the depth of Days 6 (math) and 7 (astronomy) based on the distribution.</a:t>
+              <a:t>Submit project plan paragraph (working title + thesis sentence + 2 sources) by tomorrow.</a:t>
             </a:r>
             <a:endParaRPr lang="en-US" sz="1200" dirty="0"/>
           </a:p>
@@ -2768,7 +2828,7 @@
                 <a:ea typeface="Georgia" pitchFamily="34" charset="-122"/>
                 <a:cs typeface="Georgia" pitchFamily="34" charset="-120"/>
               </a:rPr>
-              <a:t>Citation(s) used</a:t>
+              <a:t>Differentiation</a:t>
             </a:r>
             <a:endParaRPr lang="en-US" sz="1800" dirty="0"/>
           </a:p>
@@ -2782,8 +2842,8 @@
         </p:nvSpPr>
         <p:spPr>
           <a:xfrm>
-            <a:off x="406301" y="870942"/>
-            <a:ext cx="8498026" cy="213271"/>
+            <a:off x="634901" y="883593"/>
+            <a:ext cx="8102798" cy="525661"/>
           </a:xfrm>
           <a:prstGeom prst="rect">
             <a:avLst/>
@@ -2795,20 +2855,18 @@
           <a:bodyPr wrap="square" lIns="0" tIns="0" rIns="0" bIns="0" rtlCol="0" anchor="t"/>
           <a:lstStyle/>
           <a:p>
-            <a:pPr algn="l" indent="0" marL="0">
-              <a:lnSpc>
-                <a:spcPts val="1680"/>
-              </a:lnSpc>
-              <a:spcBef>
-                <a:spcPts val="300"/>
-              </a:spcBef>
-              <a:spcAft>
-                <a:spcPts val="300"/>
-              </a:spcAft>
-              <a:buNone/>
-            </a:pPr>
-            <a:r>
-              <a:rPr lang="en-US" sz="1200" dirty="0">
+            <a:pPr algn="l" marL="342900" indent="-342900">
+              <a:lnSpc>
+                <a:spcPts val="1620"/>
+              </a:lnSpc>
+              <a:spcAft>
+                <a:spcPts val="300"/>
+              </a:spcAft>
+              <a:buSzPct val="100000"/>
+              <a:buChar char="•"/>
+            </a:pPr>
+            <a:r>
+              <a:rPr lang="en-US" sz="1200" b="1" dirty="0">
                 <a:solidFill>
                   <a:srgbClr val="1C2833"/>
                 </a:solidFill>
@@ -2816,7 +2874,503 @@
                 <a:ea typeface="Arial" pitchFamily="34" charset="-122"/>
                 <a:cs typeface="Arial" pitchFamily="34" charset="-120"/>
               </a:rPr>
-              <a:t>– All sources covered to date.</a:t>
+              <a:t>Tier up:</a:t>
+            </a:r>
+            <a:pPr algn="l" indent="0" marL="0">
+              <a:lnSpc>
+                <a:spcPts val="1620"/>
+              </a:lnSpc>
+              <a:spcAft>
+                <a:spcPts val="300"/>
+              </a:spcAft>
+              <a:buNone/>
+            </a:pPr>
+            <a:r>
+              <a:rPr lang="en-US" sz="1200" dirty="0">
+                <a:solidFill>
+                  <a:srgbClr val="1C2833"/>
+                </a:solidFill>
+                <a:latin typeface="Arial" pitchFamily="34" charset="0"/>
+                <a:ea typeface="Arial" pitchFamily="34" charset="-122"/>
+                <a:cs typeface="Arial" pitchFamily="34" charset="-120"/>
+              </a:rPr>
+              <a:t> Pick a less common topic (Pāṇini, Mādhava). The research is harder; the project will stand out.</a:t>
+            </a:r>
+            <a:endParaRPr lang="en-US" sz="1200" dirty="0"/>
+          </a:p>
+          <a:p>
+            <a:pPr algn="l" marL="342900" indent="-342900">
+              <a:lnSpc>
+                <a:spcPts val="1620"/>
+              </a:lnSpc>
+              <a:spcAft>
+                <a:spcPts val="300"/>
+              </a:spcAft>
+              <a:buSzPct val="100000"/>
+              <a:buChar char="•"/>
+            </a:pPr>
+            <a:r>
+              <a:rPr lang="en-US" sz="1200" b="1" dirty="0">
+                <a:solidFill>
+                  <a:srgbClr val="1C2833"/>
+                </a:solidFill>
+                <a:latin typeface="Arial" pitchFamily="34" charset="0"/>
+                <a:ea typeface="Arial" pitchFamily="34" charset="-122"/>
+                <a:cs typeface="Arial" pitchFamily="34" charset="-120"/>
+              </a:rPr>
+              <a:t>Tier down:</a:t>
+            </a:r>
+            <a:pPr algn="l" indent="0" marL="0">
+              <a:lnSpc>
+                <a:spcPts val="1620"/>
+              </a:lnSpc>
+              <a:spcAft>
+                <a:spcPts val="300"/>
+              </a:spcAft>
+              <a:buNone/>
+            </a:pPr>
+            <a:r>
+              <a:rPr lang="en-US" sz="1200" dirty="0">
+                <a:solidFill>
+                  <a:srgbClr val="1C2833"/>
+                </a:solidFill>
+                <a:latin typeface="Arial" pitchFamily="34" charset="0"/>
+                <a:ea typeface="Arial" pitchFamily="34" charset="-122"/>
+                <a:cs typeface="Arial" pitchFamily="34" charset="-120"/>
+              </a:rPr>
+              <a:t> Pick a well-documented topic (zero, Aryabhata, Suśruta). Easier research.</a:t>
+            </a:r>
+            <a:endParaRPr lang="en-US" sz="1200" dirty="0"/>
+          </a:p>
+        </p:txBody>
+      </p:sp>
+      <p:sp>
+        <p:nvSpPr>
+          <p:cNvPr id="5" name="Text 3"/>
+          <p:cNvSpPr/>
+          <p:nvPr/>
+        </p:nvSpPr>
+        <p:spPr>
+          <a:xfrm>
+            <a:off x="406301" y="4434929"/>
+            <a:ext cx="8498026" cy="213271"/>
+          </a:xfrm>
+          <a:prstGeom prst="rect">
+            <a:avLst/>
+          </a:prstGeom>
+          <a:noFill/>
+          <a:ln/>
+        </p:spPr>
+        <p:txBody>
+          <a:bodyPr wrap="square" lIns="0" tIns="0" rIns="0" bIns="0" rtlCol="0" anchor="t"/>
+          <a:lstStyle/>
+          <a:p>
+            <a:pPr algn="l" indent="0" marL="0">
+              <a:lnSpc>
+                <a:spcPts val="1680"/>
+              </a:lnSpc>
+              <a:spcBef>
+                <a:spcPts val="300"/>
+              </a:spcBef>
+              <a:spcAft>
+                <a:spcPts val="300"/>
+              </a:spcAft>
+              <a:buNone/>
+            </a:pPr>
+            <a:r>
+              <a:rPr lang="en-US" sz="1200" dirty="0">
+                <a:solidFill>
+                  <a:srgbClr val="1C2833"/>
+                </a:solidFill>
+                <a:latin typeface="Arial" pitchFamily="34" charset="0"/>
+                <a:ea typeface="Arial" pitchFamily="34" charset="-122"/>
+                <a:cs typeface="Arial" pitchFamily="34" charset="-120"/>
+              </a:rPr>
+              <a:t>Middle ·  · IKS Curriculum</a:t>
+            </a:r>
+            <a:endParaRPr lang="en-US" sz="1200" dirty="0"/>
+          </a:p>
+        </p:txBody>
+      </p:sp>
+    </p:spTree>
+  </p:cSld>
+  <p:clrMapOvr>
+    <a:masterClrMapping/>
+  </p:clrMapOvr>
+</p:sld>
+</file>
+
+<file path=ppt/slides/slide13.xml><?xml version="1.0" encoding="utf-8"?>
+<p:sld xmlns:a="http://schemas.openxmlformats.org/drawingml/2006/main" xmlns:r="http://schemas.openxmlformats.org/officeDocument/2006/relationships" xmlns:p="http://schemas.openxmlformats.org/presentationml/2006/main">
+  <p:cSld name="Slide 13">
+    <p:bg>
+      <p:bgPr>
+        <a:solidFill>
+          <a:srgbClr val="FFFFFF"/>
+        </a:solidFill>
+      </p:bgPr>
+    </p:bg>
+    <p:spTree>
+      <p:nvGrpSpPr>
+        <p:cNvPr id="1" name=""/>
+        <p:cNvGrpSpPr/>
+        <p:nvPr/>
+      </p:nvGrpSpPr>
+      <p:grpSpPr>
+        <a:xfrm>
+          <a:off x="0" y="0"/>
+          <a:ext cx="0" cy="0"/>
+          <a:chOff x="0" y="0"/>
+          <a:chExt cx="0" cy="0"/>
+        </a:xfrm>
+      </p:grpSpPr>
+      <p:sp>
+        <p:nvSpPr>
+          <p:cNvPr id="2" name="Text 0"/>
+          <p:cNvSpPr/>
+          <p:nvPr/>
+        </p:nvSpPr>
+        <p:spPr>
+          <a:xfrm>
+            <a:off x="0" y="0"/>
+            <a:ext cx="9144000" cy="101501"/>
+          </a:xfrm>
+          <a:prstGeom prst="rect">
+            <a:avLst/>
+          </a:prstGeom>
+          <a:solidFill>
+            <a:srgbClr val="277884"/>
+          </a:solidFill>
+          <a:ln/>
+        </p:spPr>
+        <p:txBody>
+          <a:bodyPr wrap="square" rtlCol="0" anchor="ctr"/>
+          <a:lstStyle/>
+          <a:p>
+            <a:pPr indent="0" marL="0">
+              <a:buNone/>
+            </a:pPr>
+            <a:endParaRPr lang="en-US" dirty="0"/>
+          </a:p>
+        </p:txBody>
+      </p:sp>
+      <p:sp>
+        <p:nvSpPr>
+          <p:cNvPr id="3" name="Text 1"/>
+          <p:cNvSpPr/>
+          <p:nvPr/>
+        </p:nvSpPr>
+        <p:spPr>
+          <a:xfrm>
+            <a:off x="406301" y="457051"/>
+            <a:ext cx="8498026" cy="274290"/>
+          </a:xfrm>
+          <a:prstGeom prst="rect">
+            <a:avLst/>
+          </a:prstGeom>
+          <a:noFill/>
+          <a:ln/>
+        </p:spPr>
+        <p:txBody>
+          <a:bodyPr wrap="square" lIns="0" tIns="0" rIns="0" bIns="0" rtlCol="0" anchor="t"/>
+          <a:lstStyle/>
+          <a:p>
+            <a:pPr algn="l" indent="0" marL="0">
+              <a:lnSpc>
+                <a:spcPts val="2160"/>
+              </a:lnSpc>
+              <a:spcBef>
+                <a:spcPts val="600"/>
+              </a:spcBef>
+              <a:spcAft>
+                <a:spcPts val="800"/>
+              </a:spcAft>
+              <a:buNone/>
+            </a:pPr>
+            <a:r>
+              <a:rPr lang="en-US" sz="1800" b="1" dirty="0">
+                <a:solidFill>
+                  <a:srgbClr val="FE4447"/>
+                </a:solidFill>
+                <a:latin typeface="Georgia" pitchFamily="34" charset="0"/>
+                <a:ea typeface="Georgia" pitchFamily="34" charset="-122"/>
+                <a:cs typeface="Georgia" pitchFamily="34" charset="-120"/>
+              </a:rPr>
+              <a:t>Teacher notes</a:t>
+            </a:r>
+            <a:endParaRPr lang="en-US" sz="1800" dirty="0"/>
+          </a:p>
+        </p:txBody>
+      </p:sp>
+      <p:sp>
+        <p:nvSpPr>
+          <p:cNvPr id="4" name="Text 2"/>
+          <p:cNvSpPr/>
+          <p:nvPr/>
+        </p:nvSpPr>
+        <p:spPr>
+          <a:xfrm>
+            <a:off x="634901" y="883593"/>
+            <a:ext cx="8102798" cy="731341"/>
+          </a:xfrm>
+          <a:prstGeom prst="rect">
+            <a:avLst/>
+          </a:prstGeom>
+          <a:noFill/>
+          <a:ln/>
+        </p:spPr>
+        <p:txBody>
+          <a:bodyPr wrap="square" lIns="0" tIns="0" rIns="0" bIns="0" rtlCol="0" anchor="t"/>
+          <a:lstStyle/>
+          <a:p>
+            <a:pPr algn="l" marL="342900" indent="-342900">
+              <a:lnSpc>
+                <a:spcPts val="1620"/>
+              </a:lnSpc>
+              <a:spcAft>
+                <a:spcPts val="300"/>
+              </a:spcAft>
+              <a:buSzPct val="100000"/>
+              <a:buChar char="•"/>
+            </a:pPr>
+            <a:r>
+              <a:rPr lang="en-US" sz="1200" dirty="0">
+                <a:solidFill>
+                  <a:srgbClr val="1C2833"/>
+                </a:solidFill>
+                <a:latin typeface="Arial" pitchFamily="34" charset="0"/>
+                <a:ea typeface="Arial" pitchFamily="34" charset="-122"/>
+                <a:cs typeface="Arial" pitchFamily="34" charset="-120"/>
+              </a:rPr>
+              <a:t>Mark the formative quiz tonight. Note any student who scored below 50% — schedule a 10-min check-in by Day 7.</a:t>
+            </a:r>
+            <a:endParaRPr lang="en-US" sz="1200" dirty="0"/>
+          </a:p>
+          <a:p>
+            <a:pPr algn="l" marL="342900" indent="-342900">
+              <a:lnSpc>
+                <a:spcPts val="1620"/>
+              </a:lnSpc>
+              <a:spcAft>
+                <a:spcPts val="300"/>
+              </a:spcAft>
+              <a:buSzPct val="100000"/>
+              <a:buChar char="•"/>
+            </a:pPr>
+            <a:r>
+              <a:rPr lang="en-US" sz="1200" dirty="0">
+                <a:solidFill>
+                  <a:srgbClr val="1C2833"/>
+                </a:solidFill>
+                <a:latin typeface="Arial" pitchFamily="34" charset="0"/>
+                <a:ea typeface="Arial" pitchFamily="34" charset="-122"/>
+                <a:cs typeface="Arial" pitchFamily="34" charset="-120"/>
+              </a:rPr>
+              <a:t>The project topic choice often surfaces what students are curious about. Adjust the depth of Days 6 (math) and 7 (astronomy) based on the distribution.</a:t>
+            </a:r>
+            <a:endParaRPr lang="en-US" sz="1200" dirty="0"/>
+          </a:p>
+        </p:txBody>
+      </p:sp>
+      <p:sp>
+        <p:nvSpPr>
+          <p:cNvPr id="5" name="Text 3"/>
+          <p:cNvSpPr/>
+          <p:nvPr/>
+        </p:nvSpPr>
+        <p:spPr>
+          <a:xfrm>
+            <a:off x="406301" y="4434929"/>
+            <a:ext cx="8498026" cy="213271"/>
+          </a:xfrm>
+          <a:prstGeom prst="rect">
+            <a:avLst/>
+          </a:prstGeom>
+          <a:noFill/>
+          <a:ln/>
+        </p:spPr>
+        <p:txBody>
+          <a:bodyPr wrap="square" lIns="0" tIns="0" rIns="0" bIns="0" rtlCol="0" anchor="t"/>
+          <a:lstStyle/>
+          <a:p>
+            <a:pPr algn="l" indent="0" marL="0">
+              <a:lnSpc>
+                <a:spcPts val="1680"/>
+              </a:lnSpc>
+              <a:spcBef>
+                <a:spcPts val="300"/>
+              </a:spcBef>
+              <a:spcAft>
+                <a:spcPts val="300"/>
+              </a:spcAft>
+              <a:buNone/>
+            </a:pPr>
+            <a:r>
+              <a:rPr lang="en-US" sz="1200" dirty="0">
+                <a:solidFill>
+                  <a:srgbClr val="1C2833"/>
+                </a:solidFill>
+                <a:latin typeface="Arial" pitchFamily="34" charset="0"/>
+                <a:ea typeface="Arial" pitchFamily="34" charset="-122"/>
+                <a:cs typeface="Arial" pitchFamily="34" charset="-120"/>
+              </a:rPr>
+              <a:t>Middle ·  · IKS Curriculum</a:t>
+            </a:r>
+            <a:endParaRPr lang="en-US" sz="1200" dirty="0"/>
+          </a:p>
+        </p:txBody>
+      </p:sp>
+    </p:spTree>
+  </p:cSld>
+  <p:clrMapOvr>
+    <a:masterClrMapping/>
+  </p:clrMapOvr>
+</p:sld>
+</file>
+
+<file path=ppt/slides/slide14.xml><?xml version="1.0" encoding="utf-8"?>
+<p:sld xmlns:a="http://schemas.openxmlformats.org/drawingml/2006/main" xmlns:r="http://schemas.openxmlformats.org/officeDocument/2006/relationships" xmlns:p="http://schemas.openxmlformats.org/presentationml/2006/main">
+  <p:cSld name="Slide 14">
+    <p:bg>
+      <p:bgPr>
+        <a:solidFill>
+          <a:srgbClr val="FFFFFF"/>
+        </a:solidFill>
+      </p:bgPr>
+    </p:bg>
+    <p:spTree>
+      <p:nvGrpSpPr>
+        <p:cNvPr id="1" name=""/>
+        <p:cNvGrpSpPr/>
+        <p:nvPr/>
+      </p:nvGrpSpPr>
+      <p:grpSpPr>
+        <a:xfrm>
+          <a:off x="0" y="0"/>
+          <a:ext cx="0" cy="0"/>
+          <a:chOff x="0" y="0"/>
+          <a:chExt cx="0" cy="0"/>
+        </a:xfrm>
+      </p:grpSpPr>
+      <p:sp>
+        <p:nvSpPr>
+          <p:cNvPr id="2" name="Text 0"/>
+          <p:cNvSpPr/>
+          <p:nvPr/>
+        </p:nvSpPr>
+        <p:spPr>
+          <a:xfrm>
+            <a:off x="0" y="0"/>
+            <a:ext cx="9144000" cy="101501"/>
+          </a:xfrm>
+          <a:prstGeom prst="rect">
+            <a:avLst/>
+          </a:prstGeom>
+          <a:solidFill>
+            <a:srgbClr val="277884"/>
+          </a:solidFill>
+          <a:ln/>
+        </p:spPr>
+        <p:txBody>
+          <a:bodyPr wrap="square" rtlCol="0" anchor="ctr"/>
+          <a:lstStyle/>
+          <a:p>
+            <a:pPr indent="0" marL="0">
+              <a:buNone/>
+            </a:pPr>
+            <a:endParaRPr lang="en-US" dirty="0"/>
+          </a:p>
+        </p:txBody>
+      </p:sp>
+      <p:sp>
+        <p:nvSpPr>
+          <p:cNvPr id="3" name="Text 1"/>
+          <p:cNvSpPr/>
+          <p:nvPr/>
+        </p:nvSpPr>
+        <p:spPr>
+          <a:xfrm>
+            <a:off x="406301" y="457051"/>
+            <a:ext cx="8498026" cy="274290"/>
+          </a:xfrm>
+          <a:prstGeom prst="rect">
+            <a:avLst/>
+          </a:prstGeom>
+          <a:noFill/>
+          <a:ln/>
+        </p:spPr>
+        <p:txBody>
+          <a:bodyPr wrap="square" lIns="0" tIns="0" rIns="0" bIns="0" rtlCol="0" anchor="t"/>
+          <a:lstStyle/>
+          <a:p>
+            <a:pPr algn="l" indent="0" marL="0">
+              <a:lnSpc>
+                <a:spcPts val="2160"/>
+              </a:lnSpc>
+              <a:spcBef>
+                <a:spcPts val="600"/>
+              </a:spcBef>
+              <a:spcAft>
+                <a:spcPts val="800"/>
+              </a:spcAft>
+              <a:buNone/>
+            </a:pPr>
+            <a:r>
+              <a:rPr lang="en-US" sz="1800" b="1" dirty="0">
+                <a:solidFill>
+                  <a:srgbClr val="FE4447"/>
+                </a:solidFill>
+                <a:latin typeface="Georgia" pitchFamily="34" charset="0"/>
+                <a:ea typeface="Georgia" pitchFamily="34" charset="-122"/>
+                <a:cs typeface="Georgia" pitchFamily="34" charset="-120"/>
+              </a:rPr>
+              <a:t>Citation(s) used</a:t>
+            </a:r>
+            <a:endParaRPr lang="en-US" sz="1800" dirty="0"/>
+          </a:p>
+        </p:txBody>
+      </p:sp>
+      <p:sp>
+        <p:nvSpPr>
+          <p:cNvPr id="4" name="Text 2"/>
+          <p:cNvSpPr/>
+          <p:nvPr/>
+        </p:nvSpPr>
+        <p:spPr>
+          <a:xfrm>
+            <a:off x="634901" y="883593"/>
+            <a:ext cx="8102798" cy="281880"/>
+          </a:xfrm>
+          <a:prstGeom prst="rect">
+            <a:avLst/>
+          </a:prstGeom>
+          <a:noFill/>
+          <a:ln/>
+        </p:spPr>
+        <p:txBody>
+          <a:bodyPr wrap="square" lIns="0" tIns="0" rIns="0" bIns="0" rtlCol="0" anchor="t"/>
+          <a:lstStyle/>
+          <a:p>
+            <a:pPr algn="l" marL="342900" indent="-342900">
+              <a:lnSpc>
+                <a:spcPts val="1620"/>
+              </a:lnSpc>
+              <a:spcAft>
+                <a:spcPts val="300"/>
+              </a:spcAft>
+              <a:buSzPct val="100000"/>
+              <a:buChar char="•"/>
+            </a:pPr>
+            <a:r>
+              <a:rPr lang="en-US" sz="1200" dirty="0">
+                <a:solidFill>
+                  <a:srgbClr val="1C2833"/>
+                </a:solidFill>
+                <a:latin typeface="Arial" pitchFamily="34" charset="0"/>
+                <a:ea typeface="Arial" pitchFamily="34" charset="-122"/>
+                <a:cs typeface="Arial" pitchFamily="34" charset="-120"/>
+              </a:rPr>
+              <a:t>All sources covered to date.</a:t>
             </a:r>
             <a:endParaRPr lang="en-US" sz="1200" dirty="0"/>
           </a:p>
@@ -2974,7 +3528,7 @@
                 <a:ea typeface="Georgia" pitchFamily="34" charset="-122"/>
                 <a:cs typeface="Georgia" pitchFamily="34" charset="-120"/>
               </a:rPr>
-              <a:t>Materials</a:t>
+              <a:t>Learning objective</a:t>
             </a:r>
             <a:endParaRPr lang="en-US" sz="1800" dirty="0"/>
           </a:p>
@@ -2989,7 +3543,7 @@
         <p:spPr>
           <a:xfrm>
             <a:off x="406301" y="870942"/>
-            <a:ext cx="8498026" cy="222796"/>
+            <a:ext cx="8498026" cy="213271"/>
           </a:xfrm>
           <a:prstGeom prst="rect">
             <a:avLst/>
@@ -3022,53 +3576,7 @@
                 <a:ea typeface="Arial" pitchFamily="34" charset="-122"/>
                 <a:cs typeface="Arial" pitchFamily="34" charset="-120"/>
               </a:rPr>
-              <a:t>– Formative quiz Part B (</a:t>
-            </a:r>
-            <a:pPr algn="l" indent="0" marL="0">
-              <a:lnSpc>
-                <a:spcPts val="1680"/>
-              </a:lnSpc>
-              <a:spcBef>
-                <a:spcPts val="300"/>
-              </a:spcBef>
-              <a:spcAft>
-                <a:spcPts val="300"/>
-              </a:spcAft>
-              <a:buNone/>
-            </a:pPr>
-            <a:r>
-              <a:rPr lang="en-US" sz="1200" dirty="0">
-                <a:solidFill>
-                  <a:srgbClr val="1C2833"/>
-                </a:solidFill>
-                <a:latin typeface="Arial" pitchFamily="34" charset="0"/>
-                <a:ea typeface="Arial" pitchFamily="34" charset="-122"/>
-                <a:cs typeface="Arial" pitchFamily="34" charset="-120"/>
-              </a:rPr>
-              <a:t>quizzes/formative.md</a:t>
-            </a:r>
-            <a:pPr algn="l" indent="0" marL="0">
-              <a:lnSpc>
-                <a:spcPts val="1680"/>
-              </a:lnSpc>
-              <a:spcBef>
-                <a:spcPts val="300"/>
-              </a:spcBef>
-              <a:spcAft>
-                <a:spcPts val="300"/>
-              </a:spcAft>
-              <a:buNone/>
-            </a:pPr>
-            <a:r>
-              <a:rPr lang="en-US" sz="1200" dirty="0">
-                <a:solidFill>
-                  <a:srgbClr val="1C2833"/>
-                </a:solidFill>
-                <a:latin typeface="Arial" pitchFamily="34" charset="0"/>
-                <a:ea typeface="Arial" pitchFamily="34" charset="-122"/>
-                <a:cs typeface="Arial" pitchFamily="34" charset="-120"/>
-              </a:rPr>
-              <a:t>) – Project brief handouts – Topic sticky notes</a:t>
+              <a:t>Students consolidate Days 1–4 via a formative quiz and commit to a project topic.</a:t>
             </a:r>
             <a:endParaRPr lang="en-US" sz="1200" dirty="0"/>
           </a:p>
@@ -3226,7 +3734,7 @@
                 <a:ea typeface="Georgia" pitchFamily="34" charset="-122"/>
                 <a:cs typeface="Georgia" pitchFamily="34" charset="-120"/>
               </a:rPr>
-              <a:t>Flow</a:t>
+              <a:t>Materials</a:t>
             </a:r>
             <a:endParaRPr lang="en-US" sz="1800" dirty="0"/>
           </a:p>
@@ -3235,6 +3743,140 @@
       <p:sp>
         <p:nvSpPr>
           <p:cNvPr id="4" name="Text 2"/>
+          <p:cNvSpPr/>
+          <p:nvPr/>
+        </p:nvSpPr>
+        <p:spPr>
+          <a:xfrm>
+            <a:off x="634901" y="883593"/>
+            <a:ext cx="8102798" cy="788491"/>
+          </a:xfrm>
+          <a:prstGeom prst="rect">
+            <a:avLst/>
+          </a:prstGeom>
+          <a:noFill/>
+          <a:ln/>
+        </p:spPr>
+        <p:txBody>
+          <a:bodyPr wrap="square" lIns="0" tIns="0" rIns="0" bIns="0" rtlCol="0" anchor="t"/>
+          <a:lstStyle/>
+          <a:p>
+            <a:pPr algn="l" marL="342900" indent="-342900">
+              <a:lnSpc>
+                <a:spcPts val="1620"/>
+              </a:lnSpc>
+              <a:spcAft>
+                <a:spcPts val="300"/>
+              </a:spcAft>
+              <a:buSzPct val="100000"/>
+              <a:buChar char="•"/>
+            </a:pPr>
+            <a:r>
+              <a:rPr lang="en-US" sz="1200" dirty="0">
+                <a:solidFill>
+                  <a:srgbClr val="1C2833"/>
+                </a:solidFill>
+                <a:latin typeface="Arial" pitchFamily="34" charset="0"/>
+                <a:ea typeface="Arial" pitchFamily="34" charset="-122"/>
+                <a:cs typeface="Arial" pitchFamily="34" charset="-120"/>
+              </a:rPr>
+              <a:t>Formative quiz Part B (</a:t>
+            </a:r>
+            <a:pPr algn="l" indent="0" marL="0">
+              <a:lnSpc>
+                <a:spcPts val="1620"/>
+              </a:lnSpc>
+              <a:spcAft>
+                <a:spcPts val="300"/>
+              </a:spcAft>
+              <a:buNone/>
+            </a:pPr>
+            <a:r>
+              <a:rPr lang="en-US" sz="1200" dirty="0">
+                <a:solidFill>
+                  <a:srgbClr val="1C2833"/>
+                </a:solidFill>
+                <a:latin typeface="Arial" pitchFamily="34" charset="0"/>
+                <a:ea typeface="Arial" pitchFamily="34" charset="-122"/>
+                <a:cs typeface="Arial" pitchFamily="34" charset="-120"/>
+              </a:rPr>
+              <a:t>quizzes/formative.md</a:t>
+            </a:r>
+            <a:pPr algn="l" indent="0" marL="0">
+              <a:lnSpc>
+                <a:spcPts val="1620"/>
+              </a:lnSpc>
+              <a:spcAft>
+                <a:spcPts val="300"/>
+              </a:spcAft>
+              <a:buNone/>
+            </a:pPr>
+            <a:r>
+              <a:rPr lang="en-US" sz="1200" dirty="0">
+                <a:solidFill>
+                  <a:srgbClr val="1C2833"/>
+                </a:solidFill>
+                <a:latin typeface="Arial" pitchFamily="34" charset="0"/>
+                <a:ea typeface="Arial" pitchFamily="34" charset="-122"/>
+                <a:cs typeface="Arial" pitchFamily="34" charset="-120"/>
+              </a:rPr>
+              <a:t>)</a:t>
+            </a:r>
+            <a:endParaRPr lang="en-US" sz="1200" dirty="0"/>
+          </a:p>
+          <a:p>
+            <a:pPr algn="l" marL="342900" indent="-342900">
+              <a:lnSpc>
+                <a:spcPts val="1620"/>
+              </a:lnSpc>
+              <a:spcAft>
+                <a:spcPts val="300"/>
+              </a:spcAft>
+              <a:buSzPct val="100000"/>
+              <a:buChar char="•"/>
+            </a:pPr>
+            <a:r>
+              <a:rPr lang="en-US" sz="1200" dirty="0">
+                <a:solidFill>
+                  <a:srgbClr val="1C2833"/>
+                </a:solidFill>
+                <a:latin typeface="Arial" pitchFamily="34" charset="0"/>
+                <a:ea typeface="Arial" pitchFamily="34" charset="-122"/>
+                <a:cs typeface="Arial" pitchFamily="34" charset="-120"/>
+              </a:rPr>
+              <a:t>Project brief handouts</a:t>
+            </a:r>
+            <a:endParaRPr lang="en-US" sz="1200" dirty="0"/>
+          </a:p>
+          <a:p>
+            <a:pPr algn="l" marL="342900" indent="-342900">
+              <a:lnSpc>
+                <a:spcPts val="1620"/>
+              </a:lnSpc>
+              <a:spcAft>
+                <a:spcPts val="300"/>
+              </a:spcAft>
+              <a:buSzPct val="100000"/>
+              <a:buChar char="•"/>
+            </a:pPr>
+            <a:r>
+              <a:rPr lang="en-US" sz="1200" dirty="0">
+                <a:solidFill>
+                  <a:srgbClr val="1C2833"/>
+                </a:solidFill>
+                <a:latin typeface="Arial" pitchFamily="34" charset="0"/>
+                <a:ea typeface="Arial" pitchFamily="34" charset="-122"/>
+                <a:cs typeface="Arial" pitchFamily="34" charset="-120"/>
+              </a:rPr>
+              <a:t>Topic sticky notes</a:t>
+            </a:r>
+            <a:endParaRPr lang="en-US" sz="1200" dirty="0"/>
+          </a:p>
+        </p:txBody>
+      </p:sp>
+      <p:sp>
+        <p:nvSpPr>
+          <p:cNvPr id="5" name="Text 3"/>
           <p:cNvSpPr/>
           <p:nvPr/>
         </p:nvSpPr>
@@ -3384,7 +4026,7 @@
                 <a:ea typeface="Georgia" pitchFamily="34" charset="-122"/>
                 <a:cs typeface="Georgia" pitchFamily="34" charset="-120"/>
               </a:rPr>
-              <a:t>Warm-up (5 min)</a:t>
+              <a:t>Flow</a:t>
             </a:r>
             <a:endParaRPr lang="en-US" sz="1800" dirty="0"/>
           </a:p>
@@ -3393,54 +4035,6 @@
       <p:sp>
         <p:nvSpPr>
           <p:cNvPr id="4" name="Text 2"/>
-          <p:cNvSpPr/>
-          <p:nvPr/>
-        </p:nvSpPr>
-        <p:spPr>
-          <a:xfrm>
-            <a:off x="406301" y="870942"/>
-            <a:ext cx="8498026" cy="213271"/>
-          </a:xfrm>
-          <a:prstGeom prst="rect">
-            <a:avLst/>
-          </a:prstGeom>
-          <a:noFill/>
-          <a:ln/>
-        </p:spPr>
-        <p:txBody>
-          <a:bodyPr wrap="square" lIns="0" tIns="0" rIns="0" bIns="0" rtlCol="0" anchor="t"/>
-          <a:lstStyle/>
-          <a:p>
-            <a:pPr algn="l" indent="0" marL="0">
-              <a:lnSpc>
-                <a:spcPts val="1680"/>
-              </a:lnSpc>
-              <a:spcBef>
-                <a:spcPts val="300"/>
-              </a:spcBef>
-              <a:spcAft>
-                <a:spcPts val="300"/>
-              </a:spcAft>
-              <a:buNone/>
-            </a:pPr>
-            <a:r>
-              <a:rPr lang="en-US" sz="1200" dirty="0">
-                <a:solidFill>
-                  <a:srgbClr val="1C2833"/>
-                </a:solidFill>
-                <a:latin typeface="Arial" pitchFamily="34" charset="0"/>
-                <a:ea typeface="Arial" pitchFamily="34" charset="-122"/>
-                <a:cs typeface="Arial" pitchFamily="34" charset="-120"/>
-              </a:rPr>
-              <a:t>Daily prompt. Brief recap chorus: 4 Vedas, 4 layers, 6 Vedangas (just names).</a:t>
-            </a:r>
-            <a:endParaRPr lang="en-US" sz="1200" dirty="0"/>
-          </a:p>
-        </p:txBody>
-      </p:sp>
-      <p:sp>
-        <p:nvSpPr>
-          <p:cNvPr id="5" name="Text 3"/>
           <p:cNvSpPr/>
           <p:nvPr/>
         </p:nvSpPr>
@@ -3590,7 +4184,7 @@
                 <a:ea typeface="Georgia" pitchFamily="34" charset="-122"/>
                 <a:cs typeface="Georgia" pitchFamily="34" charset="-120"/>
               </a:rPr>
-              <a:t>Formative quiz (15 min)</a:t>
+              <a:t>Warm-up (5 min)</a:t>
             </a:r>
             <a:endParaRPr lang="en-US" sz="1800" dirty="0"/>
           </a:p>
@@ -3604,8 +4198,8 @@
         </p:nvSpPr>
         <p:spPr>
           <a:xfrm>
-            <a:off x="634901" y="883593"/>
-            <a:ext cx="8102798" cy="300930"/>
+            <a:off x="406301" y="870942"/>
+            <a:ext cx="8498026" cy="213271"/>
           </a:xfrm>
           <a:prstGeom prst="rect">
             <a:avLst/>
@@ -3617,15 +4211,17 @@
           <a:bodyPr wrap="square" lIns="0" tIns="0" rIns="0" bIns="0" rtlCol="0" anchor="t"/>
           <a:lstStyle/>
           <a:p>
-            <a:pPr algn="l" marL="342900" indent="-342900">
-              <a:lnSpc>
-                <a:spcPts val="1620"/>
-              </a:lnSpc>
-              <a:spcAft>
-                <a:spcPts val="300"/>
-              </a:spcAft>
-              <a:buSzPct val="100000"/>
-              <a:buChar char="•"/>
+            <a:pPr algn="l" indent="0" marL="0">
+              <a:lnSpc>
+                <a:spcPts val="1680"/>
+              </a:lnSpc>
+              <a:spcBef>
+                <a:spcPts val="300"/>
+              </a:spcBef>
+              <a:spcAft>
+                <a:spcPts val="300"/>
+              </a:spcAft>
+              <a:buNone/>
             </a:pPr>
             <a:r>
               <a:rPr lang="en-US" sz="1200" dirty="0">
@@ -3636,27 +4232,7 @@
                 <a:ea typeface="Arial" pitchFamily="34" charset="-122"/>
                 <a:cs typeface="Arial" pitchFamily="34" charset="-120"/>
               </a:rPr>
-              <a:t>quizzes/formative.md</a:t>
-            </a:r>
-            <a:pPr algn="l" indent="0" marL="0">
-              <a:lnSpc>
-                <a:spcPts val="1620"/>
-              </a:lnSpc>
-              <a:spcAft>
-                <a:spcPts val="300"/>
-              </a:spcAft>
-              <a:buNone/>
-            </a:pPr>
-            <a:r>
-              <a:rPr lang="en-US" sz="1200" dirty="0">
-                <a:solidFill>
-                  <a:srgbClr val="1C2833"/>
-                </a:solidFill>
-                <a:latin typeface="Arial" pitchFamily="34" charset="0"/>
-                <a:ea typeface="Arial" pitchFamily="34" charset="-122"/>
-                <a:cs typeface="Arial" pitchFamily="34" charset="-120"/>
-              </a:rPr>
-              <a:t> Part B.</a:t>
+              <a:t>Daily prompt. Brief recap chorus: 4 Vedas, 4 layers, 6 Vedangas (just names).</a:t>
             </a:r>
             <a:endParaRPr lang="en-US" sz="1200" dirty="0"/>
           </a:p>
@@ -3665,54 +4241,6 @@
       <p:sp>
         <p:nvSpPr>
           <p:cNvPr id="5" name="Text 3"/>
-          <p:cNvSpPr/>
-          <p:nvPr/>
-        </p:nvSpPr>
-        <p:spPr>
-          <a:xfrm>
-            <a:off x="406301" y="1273373"/>
-            <a:ext cx="8498026" cy="213271"/>
-          </a:xfrm>
-          <a:prstGeom prst="rect">
-            <a:avLst/>
-          </a:prstGeom>
-          <a:noFill/>
-          <a:ln/>
-        </p:spPr>
-        <p:txBody>
-          <a:bodyPr wrap="square" lIns="0" tIns="0" rIns="0" bIns="0" rtlCol="0" anchor="t"/>
-          <a:lstStyle/>
-          <a:p>
-            <a:pPr algn="l" indent="0" marL="0">
-              <a:lnSpc>
-                <a:spcPts val="1680"/>
-              </a:lnSpc>
-              <a:spcBef>
-                <a:spcPts val="300"/>
-              </a:spcBef>
-              <a:spcAft>
-                <a:spcPts val="300"/>
-              </a:spcAft>
-              <a:buNone/>
-            </a:pPr>
-            <a:r>
-              <a:rPr lang="en-US" sz="1200" dirty="0">
-                <a:solidFill>
-                  <a:srgbClr val="1C2833"/>
-                </a:solidFill>
-                <a:latin typeface="Arial" pitchFamily="34" charset="0"/>
-                <a:ea typeface="Arial" pitchFamily="34" charset="-122"/>
-                <a:cs typeface="Arial" pitchFamily="34" charset="-120"/>
-              </a:rPr>
-              <a:t>– Closed notebook. 10 questions covering Vedas / layers / Vedangas / Upavedas / one named contribution.</a:t>
-            </a:r>
-            <a:endParaRPr lang="en-US" sz="1200" dirty="0"/>
-          </a:p>
-        </p:txBody>
-      </p:sp>
-      <p:sp>
-        <p:nvSpPr>
-          <p:cNvPr id="6" name="Text 4"/>
           <p:cNvSpPr/>
           <p:nvPr/>
         </p:nvSpPr>
@@ -3862,7 +4390,7 @@
                 <a:ea typeface="Georgia" pitchFamily="34" charset="-122"/>
                 <a:cs typeface="Georgia" pitchFamily="34" charset="-120"/>
               </a:rPr>
-              <a:t>Review (10 min)</a:t>
+              <a:t>Formative quiz (15 min)</a:t>
             </a:r>
             <a:endParaRPr lang="en-US" sz="1800" dirty="0"/>
           </a:p>
@@ -3876,8 +4404,8 @@
         </p:nvSpPr>
         <p:spPr>
           <a:xfrm>
-            <a:off x="406301" y="870942"/>
-            <a:ext cx="8498026" cy="213271"/>
+            <a:off x="634901" y="883593"/>
+            <a:ext cx="8102798" cy="544711"/>
           </a:xfrm>
           <a:prstGeom prst="rect">
             <a:avLst/>
@@ -3889,17 +4417,15 @@
           <a:bodyPr wrap="square" lIns="0" tIns="0" rIns="0" bIns="0" rtlCol="0" anchor="t"/>
           <a:lstStyle/>
           <a:p>
-            <a:pPr algn="l" indent="0" marL="0">
-              <a:lnSpc>
-                <a:spcPts val="1680"/>
-              </a:lnSpc>
-              <a:spcBef>
-                <a:spcPts val="300"/>
-              </a:spcBef>
-              <a:spcAft>
-                <a:spcPts val="300"/>
-              </a:spcAft>
-              <a:buNone/>
+            <a:pPr algn="l" marL="342900" indent="-342900">
+              <a:lnSpc>
+                <a:spcPts val="1620"/>
+              </a:lnSpc>
+              <a:spcAft>
+                <a:spcPts val="300"/>
+              </a:spcAft>
+              <a:buSzPct val="100000"/>
+              <a:buChar char="•"/>
             </a:pPr>
             <a:r>
               <a:rPr lang="en-US" sz="1200" dirty="0">
@@ -3910,7 +4436,51 @@
                 <a:ea typeface="Arial" pitchFamily="34" charset="-122"/>
                 <a:cs typeface="Arial" pitchFamily="34" charset="-120"/>
               </a:rPr>
-              <a:t>– Class walk-through of common errors. Don't grade now; mark tonight.</a:t>
+              <a:t>quizzes/formative.md</a:t>
+            </a:r>
+            <a:pPr algn="l" indent="0" marL="0">
+              <a:lnSpc>
+                <a:spcPts val="1620"/>
+              </a:lnSpc>
+              <a:spcAft>
+                <a:spcPts val="300"/>
+              </a:spcAft>
+              <a:buNone/>
+            </a:pPr>
+            <a:r>
+              <a:rPr lang="en-US" sz="1200" dirty="0">
+                <a:solidFill>
+                  <a:srgbClr val="1C2833"/>
+                </a:solidFill>
+                <a:latin typeface="Arial" pitchFamily="34" charset="0"/>
+                <a:ea typeface="Arial" pitchFamily="34" charset="-122"/>
+                <a:cs typeface="Arial" pitchFamily="34" charset="-120"/>
+              </a:rPr>
+              <a:t> Part B.</a:t>
+            </a:r>
+            <a:endParaRPr lang="en-US" sz="1200" dirty="0"/>
+          </a:p>
+          <a:p>
+            <a:pPr algn="l" marL="342900" indent="-342900">
+              <a:lnSpc>
+                <a:spcPts val="1620"/>
+              </a:lnSpc>
+              <a:spcAft>
+                <a:spcPts val="300"/>
+              </a:spcAft>
+              <a:buSzPct val="100000"/>
+              <a:buChar char="•"/>
+            </a:pPr>
+            <a:r>
+              <a:rPr lang="en-US" sz="1200" dirty="0">
+                <a:solidFill>
+                  <a:srgbClr val="1C2833"/>
+                </a:solidFill>
+                <a:latin typeface="Arial" pitchFamily="34" charset="0"/>
+                <a:ea typeface="Arial" pitchFamily="34" charset="-122"/>
+                <a:cs typeface="Arial" pitchFamily="34" charset="-120"/>
+              </a:rPr>
+              <a:t>Closed notebook. 10 questions covering Vedas / layers / Vedangas / Upavedas / one named contribution.</a:t>
             </a:r>
             <a:endParaRPr lang="en-US" sz="1200" dirty="0"/>
           </a:p>
@@ -4068,7 +4638,7 @@
                 <a:ea typeface="Georgia" pitchFamily="34" charset="-122"/>
                 <a:cs typeface="Georgia" pitchFamily="34" charset="-120"/>
               </a:rPr>
-              <a:t>Project commitment (10 min)</a:t>
+              <a:t>Review (10 min)</a:t>
             </a:r>
             <a:endParaRPr lang="en-US" sz="1800" dirty="0"/>
           </a:p>
@@ -4082,8 +4652,8 @@
         </p:nvSpPr>
         <p:spPr>
           <a:xfrm>
-            <a:off x="406301" y="870942"/>
-            <a:ext cx="8498026" cy="853083"/>
+            <a:off x="634901" y="883593"/>
+            <a:ext cx="8102798" cy="281880"/>
           </a:xfrm>
           <a:prstGeom prst="rect">
             <a:avLst/>
@@ -4095,17 +4665,15 @@
           <a:bodyPr wrap="square" lIns="0" tIns="0" rIns="0" bIns="0" rtlCol="0" anchor="t"/>
           <a:lstStyle/>
           <a:p>
-            <a:pPr algn="l" indent="0" marL="0">
-              <a:lnSpc>
-                <a:spcPts val="1680"/>
-              </a:lnSpc>
-              <a:spcBef>
-                <a:spcPts val="300"/>
-              </a:spcBef>
-              <a:spcAft>
-                <a:spcPts val="300"/>
-              </a:spcAft>
-              <a:buNone/>
+            <a:pPr algn="l" marL="342900" indent="-342900">
+              <a:lnSpc>
+                <a:spcPts val="1620"/>
+              </a:lnSpc>
+              <a:spcAft>
+                <a:spcPts val="300"/>
+              </a:spcAft>
+              <a:buSzPct val="100000"/>
+              <a:buChar char="•"/>
             </a:pPr>
             <a:r>
               <a:rPr lang="en-US" sz="1200" dirty="0">
@@ -4116,53 +4684,7 @@
                 <a:ea typeface="Arial" pitchFamily="34" charset="-122"/>
                 <a:cs typeface="Arial" pitchFamily="34" charset="-120"/>
               </a:rPr>
-              <a:t>– Hand out project brief. – Each student picks ONE strand: – Mathematics (zero, decimal place-value, infinite series, Bhāskara, Brahmagupta, Mādhava) – Astronomy (Aryabhata, Sūrya-siddhānta) – Medicine (Caraka, Suśruta, Āyurveda doshas) – Linguistics (Pāṇini's grammar) – Music (</a:t>
-            </a:r>
-            <a:pPr algn="l" indent="0" marL="0">
-              <a:lnSpc>
-                <a:spcPts val="1680"/>
-              </a:lnSpc>
-              <a:spcBef>
-                <a:spcPts val="300"/>
-              </a:spcBef>
-              <a:spcAft>
-                <a:spcPts val="300"/>
-              </a:spcAft>
-              <a:buNone/>
-            </a:pPr>
-            <a:r>
-              <a:rPr lang="en-US" sz="1200" i="1" dirty="0">
-                <a:solidFill>
-                  <a:srgbClr val="1C2833"/>
-                </a:solidFill>
-                <a:latin typeface="Arial" pitchFamily="34" charset="0"/>
-                <a:ea typeface="Arial" pitchFamily="34" charset="-122"/>
-                <a:cs typeface="Arial" pitchFamily="34" charset="-120"/>
-              </a:rPr>
-              <a:t>Nāṭyaśāstra</a:t>
-            </a:r>
-            <a:pPr algn="l" indent="0" marL="0">
-              <a:lnSpc>
-                <a:spcPts val="1680"/>
-              </a:lnSpc>
-              <a:spcBef>
-                <a:spcPts val="300"/>
-              </a:spcBef>
-              <a:spcAft>
-                <a:spcPts val="300"/>
-              </a:spcAft>
-              <a:buNone/>
-            </a:pPr>
-            <a:r>
-              <a:rPr lang="en-US" sz="1200" dirty="0">
-                <a:solidFill>
-                  <a:srgbClr val="1C2833"/>
-                </a:solidFill>
-                <a:latin typeface="Arial" pitchFamily="34" charset="0"/>
-                <a:ea typeface="Arial" pitchFamily="34" charset="-122"/>
-                <a:cs typeface="Arial" pitchFamily="34" charset="-120"/>
-              </a:rPr>
-              <a:t>, rāga system) – Architecture / Sthāpatya – Governance (Kauṭilya) – Other (with teacher approval)</a:t>
+              <a:t>Class walk-through of common errors. Don't grade now; mark tonight.</a:t>
             </a:r>
             <a:endParaRPr lang="en-US" sz="1200" dirty="0"/>
           </a:p>
@@ -4171,54 +4693,6 @@
       <p:sp>
         <p:nvSpPr>
           <p:cNvPr id="5" name="Text 3"/>
-          <p:cNvSpPr/>
-          <p:nvPr/>
-        </p:nvSpPr>
-        <p:spPr>
-          <a:xfrm>
-            <a:off x="406301" y="1800225"/>
-            <a:ext cx="8498026" cy="213271"/>
-          </a:xfrm>
-          <a:prstGeom prst="rect">
-            <a:avLst/>
-          </a:prstGeom>
-          <a:noFill/>
-          <a:ln/>
-        </p:spPr>
-        <p:txBody>
-          <a:bodyPr wrap="square" lIns="0" tIns="0" rIns="0" bIns="0" rtlCol="0" anchor="t"/>
-          <a:lstStyle/>
-          <a:p>
-            <a:pPr algn="l" indent="0" marL="0">
-              <a:lnSpc>
-                <a:spcPts val="1680"/>
-              </a:lnSpc>
-              <a:spcBef>
-                <a:spcPts val="300"/>
-              </a:spcBef>
-              <a:spcAft>
-                <a:spcPts val="300"/>
-              </a:spcAft>
-              <a:buNone/>
-            </a:pPr>
-            <a:r>
-              <a:rPr lang="en-US" sz="1200" dirty="0">
-                <a:solidFill>
-                  <a:srgbClr val="1C2833"/>
-                </a:solidFill>
-                <a:latin typeface="Arial" pitchFamily="34" charset="0"/>
-                <a:ea typeface="Arial" pitchFamily="34" charset="-122"/>
-                <a:cs typeface="Arial" pitchFamily="34" charset="-120"/>
-              </a:rPr>
-              <a:t>– Write topic on a sticky note + post on the wall under their chosen domain.</a:t>
-            </a:r>
-            <a:endParaRPr lang="en-US" sz="1200" dirty="0"/>
-          </a:p>
-        </p:txBody>
-      </p:sp>
-      <p:sp>
-        <p:nvSpPr>
-          <p:cNvPr id="6" name="Text 4"/>
           <p:cNvSpPr/>
           <p:nvPr/>
         </p:nvSpPr>
@@ -4368,7 +4842,7 @@
                 <a:ea typeface="Georgia" pitchFamily="34" charset="-122"/>
                 <a:cs typeface="Georgia" pitchFamily="34" charset="-120"/>
               </a:rPr>
-              <a:t>Wrap-up (5 min)</a:t>
+              <a:t>Project commitment (10 min)</a:t>
             </a:r>
             <a:endParaRPr lang="en-US" sz="1800" dirty="0"/>
           </a:p>
@@ -4382,8 +4856,8 @@
         </p:nvSpPr>
         <p:spPr>
           <a:xfrm>
-            <a:off x="406301" y="870942"/>
-            <a:ext cx="8498026" cy="426541"/>
+            <a:off x="634901" y="883593"/>
+            <a:ext cx="8102798" cy="2475905"/>
           </a:xfrm>
           <a:prstGeom prst="rect">
             <a:avLst/>
@@ -4395,17 +4869,15 @@
           <a:bodyPr wrap="square" lIns="0" tIns="0" rIns="0" bIns="0" rtlCol="0" anchor="t"/>
           <a:lstStyle/>
           <a:p>
-            <a:pPr algn="l" indent="0" marL="0">
-              <a:lnSpc>
-                <a:spcPts val="1680"/>
-              </a:lnSpc>
-              <a:spcBef>
-                <a:spcPts val="300"/>
-              </a:spcBef>
-              <a:spcAft>
-                <a:spcPts val="300"/>
-              </a:spcAft>
-              <a:buNone/>
+            <a:pPr algn="l" marL="342900" indent="-342900">
+              <a:lnSpc>
+                <a:spcPts val="1620"/>
+              </a:lnSpc>
+              <a:spcAft>
+                <a:spcPts val="300"/>
+              </a:spcAft>
+              <a:buSzPct val="100000"/>
+              <a:buChar char="•"/>
             </a:pPr>
             <a:r>
               <a:rPr lang="en-US" sz="1200" dirty="0">
@@ -4416,22 +4888,23 @@
                 <a:ea typeface="Arial" pitchFamily="34" charset="-122"/>
                 <a:cs typeface="Arial" pitchFamily="34" charset="-120"/>
               </a:rPr>
-              <a:t>– Note: "Some domains will have 5+ students, some will have 1. Each will be different. That's fine." – Preview Day 6: </a:t>
-            </a:r>
-            <a:pPr algn="l" indent="0" marL="0">
-              <a:lnSpc>
-                <a:spcPts val="1680"/>
-              </a:lnSpc>
-              <a:spcBef>
-                <a:spcPts val="300"/>
-              </a:spcBef>
-              <a:spcAft>
-                <a:spcPts val="300"/>
-              </a:spcAft>
-              <a:buNone/>
-            </a:pPr>
-            <a:r>
-              <a:rPr lang="en-US" sz="1200" i="1" dirty="0">
+              <a:t>Hand out project brief.</a:t>
+            </a:r>
+            <a:endParaRPr lang="en-US" sz="1200" dirty="0"/>
+          </a:p>
+          <a:p>
+            <a:pPr algn="l" marL="342900" indent="-342900">
+              <a:lnSpc>
+                <a:spcPts val="1620"/>
+              </a:lnSpc>
+              <a:spcAft>
+                <a:spcPts val="300"/>
+              </a:spcAft>
+              <a:buSzPct val="100000"/>
+              <a:buChar char="•"/>
+            </a:pPr>
+            <a:r>
+              <a:rPr lang="en-US" sz="1200" dirty="0">
                 <a:solidFill>
                   <a:srgbClr val="1C2833"/>
                 </a:solidFill>
@@ -4439,7 +4912,239 @@
                 <a:ea typeface="Arial" pitchFamily="34" charset="-122"/>
                 <a:cs typeface="Arial" pitchFamily="34" charset="-120"/>
               </a:rPr>
-              <a:t>"Tomorrow — deep on Indian mathematics. Zero. Place value. Infinite series."</a:t>
+              <a:t>Each student picks ONE strand:</a:t>
+            </a:r>
+            <a:endParaRPr lang="en-US" sz="1200" dirty="0"/>
+          </a:p>
+          <a:p>
+            <a:pPr algn="l" marL="342900" indent="-342900">
+              <a:lnSpc>
+                <a:spcPts val="1620"/>
+              </a:lnSpc>
+              <a:spcAft>
+                <a:spcPts val="300"/>
+              </a:spcAft>
+              <a:buSzPct val="100000"/>
+              <a:buChar char="•"/>
+            </a:pPr>
+            <a:r>
+              <a:rPr lang="en-US" sz="1200" dirty="0">
+                <a:solidFill>
+                  <a:srgbClr val="1C2833"/>
+                </a:solidFill>
+                <a:latin typeface="Arial" pitchFamily="34" charset="0"/>
+                <a:ea typeface="Arial" pitchFamily="34" charset="-122"/>
+                <a:cs typeface="Arial" pitchFamily="34" charset="-120"/>
+              </a:rPr>
+              <a:t>Mathematics (zero, decimal place-value, infinite series, Bhāskara, Brahmagupta, Mādhava)</a:t>
+            </a:r>
+            <a:endParaRPr lang="en-US" sz="1200" dirty="0"/>
+          </a:p>
+          <a:p>
+            <a:pPr algn="l" marL="342900" indent="-342900">
+              <a:lnSpc>
+                <a:spcPts val="1620"/>
+              </a:lnSpc>
+              <a:spcAft>
+                <a:spcPts val="300"/>
+              </a:spcAft>
+              <a:buSzPct val="100000"/>
+              <a:buChar char="•"/>
+            </a:pPr>
+            <a:r>
+              <a:rPr lang="en-US" sz="1200" dirty="0">
+                <a:solidFill>
+                  <a:srgbClr val="1C2833"/>
+                </a:solidFill>
+                <a:latin typeface="Arial" pitchFamily="34" charset="0"/>
+                <a:ea typeface="Arial" pitchFamily="34" charset="-122"/>
+                <a:cs typeface="Arial" pitchFamily="34" charset="-120"/>
+              </a:rPr>
+              <a:t>Astronomy (Aryabhata, Sūrya-siddhānta)</a:t>
+            </a:r>
+            <a:endParaRPr lang="en-US" sz="1200" dirty="0"/>
+          </a:p>
+          <a:p>
+            <a:pPr algn="l" marL="342900" indent="-342900">
+              <a:lnSpc>
+                <a:spcPts val="1620"/>
+              </a:lnSpc>
+              <a:spcAft>
+                <a:spcPts val="300"/>
+              </a:spcAft>
+              <a:buSzPct val="100000"/>
+              <a:buChar char="•"/>
+            </a:pPr>
+            <a:r>
+              <a:rPr lang="en-US" sz="1200" dirty="0">
+                <a:solidFill>
+                  <a:srgbClr val="1C2833"/>
+                </a:solidFill>
+                <a:latin typeface="Arial" pitchFamily="34" charset="0"/>
+                <a:ea typeface="Arial" pitchFamily="34" charset="-122"/>
+                <a:cs typeface="Arial" pitchFamily="34" charset="-120"/>
+              </a:rPr>
+              <a:t>Medicine (Caraka, Suśruta, Āyurveda doshas)</a:t>
+            </a:r>
+            <a:endParaRPr lang="en-US" sz="1200" dirty="0"/>
+          </a:p>
+          <a:p>
+            <a:pPr algn="l" marL="342900" indent="-342900">
+              <a:lnSpc>
+                <a:spcPts val="1620"/>
+              </a:lnSpc>
+              <a:spcAft>
+                <a:spcPts val="300"/>
+              </a:spcAft>
+              <a:buSzPct val="100000"/>
+              <a:buChar char="•"/>
+            </a:pPr>
+            <a:r>
+              <a:rPr lang="en-US" sz="1200" dirty="0">
+                <a:solidFill>
+                  <a:srgbClr val="1C2833"/>
+                </a:solidFill>
+                <a:latin typeface="Arial" pitchFamily="34" charset="0"/>
+                <a:ea typeface="Arial" pitchFamily="34" charset="-122"/>
+                <a:cs typeface="Arial" pitchFamily="34" charset="-120"/>
+              </a:rPr>
+              <a:t>Linguistics (Pāṇini's grammar)</a:t>
+            </a:r>
+            <a:endParaRPr lang="en-US" sz="1200" dirty="0"/>
+          </a:p>
+          <a:p>
+            <a:pPr algn="l" marL="342900" indent="-342900">
+              <a:lnSpc>
+                <a:spcPts val="1620"/>
+              </a:lnSpc>
+              <a:spcAft>
+                <a:spcPts val="300"/>
+              </a:spcAft>
+              <a:buSzPct val="100000"/>
+              <a:buChar char="•"/>
+            </a:pPr>
+            <a:r>
+              <a:rPr lang="en-US" sz="1200" dirty="0">
+                <a:solidFill>
+                  <a:srgbClr val="1C2833"/>
+                </a:solidFill>
+                <a:latin typeface="Arial" pitchFamily="34" charset="0"/>
+                <a:ea typeface="Arial" pitchFamily="34" charset="-122"/>
+                <a:cs typeface="Arial" pitchFamily="34" charset="-120"/>
+              </a:rPr>
+              <a:t>Music (</a:t>
+            </a:r>
+            <a:pPr algn="l" indent="0" marL="0">
+              <a:lnSpc>
+                <a:spcPts val="1620"/>
+              </a:lnSpc>
+              <a:spcAft>
+                <a:spcPts val="300"/>
+              </a:spcAft>
+              <a:buNone/>
+            </a:pPr>
+            <a:r>
+              <a:rPr lang="en-US" sz="1200" i="1" dirty="0">
+                <a:solidFill>
+                  <a:srgbClr val="1C2833"/>
+                </a:solidFill>
+                <a:latin typeface="Arial" pitchFamily="34" charset="0"/>
+                <a:ea typeface="Arial" pitchFamily="34" charset="-122"/>
+                <a:cs typeface="Arial" pitchFamily="34" charset="-120"/>
+              </a:rPr>
+              <a:t>Nāṭyaśāstra</a:t>
+            </a:r>
+            <a:pPr algn="l" indent="0" marL="0">
+              <a:lnSpc>
+                <a:spcPts val="1620"/>
+              </a:lnSpc>
+              <a:spcAft>
+                <a:spcPts val="300"/>
+              </a:spcAft>
+              <a:buNone/>
+            </a:pPr>
+            <a:r>
+              <a:rPr lang="en-US" sz="1200" dirty="0">
+                <a:solidFill>
+                  <a:srgbClr val="1C2833"/>
+                </a:solidFill>
+                <a:latin typeface="Arial" pitchFamily="34" charset="0"/>
+                <a:ea typeface="Arial" pitchFamily="34" charset="-122"/>
+                <a:cs typeface="Arial" pitchFamily="34" charset="-120"/>
+              </a:rPr>
+              <a:t>, rāga system)</a:t>
+            </a:r>
+            <a:endParaRPr lang="en-US" sz="1200" dirty="0"/>
+          </a:p>
+          <a:p>
+            <a:pPr algn="l" marL="342900" indent="-342900">
+              <a:lnSpc>
+                <a:spcPts val="1620"/>
+              </a:lnSpc>
+              <a:spcAft>
+                <a:spcPts val="300"/>
+              </a:spcAft>
+              <a:buSzPct val="100000"/>
+              <a:buChar char="•"/>
+            </a:pPr>
+            <a:r>
+              <a:rPr lang="en-US" sz="1200" dirty="0">
+                <a:solidFill>
+                  <a:srgbClr val="1C2833"/>
+                </a:solidFill>
+                <a:latin typeface="Arial" pitchFamily="34" charset="0"/>
+                <a:ea typeface="Arial" pitchFamily="34" charset="-122"/>
+                <a:cs typeface="Arial" pitchFamily="34" charset="-120"/>
+              </a:rPr>
+              <a:t>Architecture / Sthāpatya</a:t>
+            </a:r>
+            <a:endParaRPr lang="en-US" sz="1200" dirty="0"/>
+          </a:p>
+          <a:p>
+            <a:pPr algn="l" marL="342900" indent="-342900">
+              <a:lnSpc>
+                <a:spcPts val="1620"/>
+              </a:lnSpc>
+              <a:spcAft>
+                <a:spcPts val="300"/>
+              </a:spcAft>
+              <a:buSzPct val="100000"/>
+              <a:buChar char="•"/>
+            </a:pPr>
+            <a:r>
+              <a:rPr lang="en-US" sz="1200" dirty="0">
+                <a:solidFill>
+                  <a:srgbClr val="1C2833"/>
+                </a:solidFill>
+                <a:latin typeface="Arial" pitchFamily="34" charset="0"/>
+                <a:ea typeface="Arial" pitchFamily="34" charset="-122"/>
+                <a:cs typeface="Arial" pitchFamily="34" charset="-120"/>
+              </a:rPr>
+              <a:t>Governance (Kauṭilya)</a:t>
+            </a:r>
+            <a:endParaRPr lang="en-US" sz="1200" dirty="0"/>
+          </a:p>
+          <a:p>
+            <a:pPr algn="l" marL="342900" indent="-342900">
+              <a:lnSpc>
+                <a:spcPts val="1620"/>
+              </a:lnSpc>
+              <a:spcAft>
+                <a:spcPts val="300"/>
+              </a:spcAft>
+              <a:buSzPct val="100000"/>
+              <a:buChar char="•"/>
+            </a:pPr>
+            <a:r>
+              <a:rPr lang="en-US" sz="1200" dirty="0">
+                <a:solidFill>
+                  <a:srgbClr val="1C2833"/>
+                </a:solidFill>
+                <a:latin typeface="Arial" pitchFamily="34" charset="0"/>
+                <a:ea typeface="Arial" pitchFamily="34" charset="-122"/>
+                <a:cs typeface="Arial" pitchFamily="34" charset="-120"/>
+              </a:rPr>
+              <a:t>Other (with teacher approval)</a:t>
             </a:r>
             <a:endParaRPr lang="en-US" sz="1200" dirty="0"/>
           </a:p>
@@ -4597,7 +5302,7 @@
                 <a:ea typeface="Georgia" pitchFamily="34" charset="-122"/>
                 <a:cs typeface="Georgia" pitchFamily="34" charset="-120"/>
               </a:rPr>
-              <a:t>Homework</a:t>
+              <a:t>Project commitment (10 min) (cont.)</a:t>
             </a:r>
             <a:endParaRPr lang="en-US" sz="1800" dirty="0"/>
           </a:p>
@@ -4611,8 +5316,8 @@
         </p:nvSpPr>
         <p:spPr>
           <a:xfrm>
-            <a:off x="406301" y="870942"/>
-            <a:ext cx="8498026" cy="213271"/>
+            <a:off x="634901" y="883593"/>
+            <a:ext cx="8102798" cy="281880"/>
           </a:xfrm>
           <a:prstGeom prst="rect">
             <a:avLst/>
@@ -4624,17 +5329,15 @@
           <a:bodyPr wrap="square" lIns="0" tIns="0" rIns="0" bIns="0" rtlCol="0" anchor="t"/>
           <a:lstStyle/>
           <a:p>
-            <a:pPr algn="l" indent="0" marL="0">
-              <a:lnSpc>
-                <a:spcPts val="1680"/>
-              </a:lnSpc>
-              <a:spcBef>
-                <a:spcPts val="300"/>
-              </a:spcBef>
-              <a:spcAft>
-                <a:spcPts val="300"/>
-              </a:spcAft>
-              <a:buNone/>
+            <a:pPr algn="l" marL="342900" indent="-342900">
+              <a:lnSpc>
+                <a:spcPts val="1620"/>
+              </a:lnSpc>
+              <a:spcAft>
+                <a:spcPts val="300"/>
+              </a:spcAft>
+              <a:buSzPct val="100000"/>
+              <a:buChar char="•"/>
             </a:pPr>
             <a:r>
               <a:rPr lang="en-US" sz="1200" dirty="0">
@@ -4645,7 +5348,7 @@
                 <a:ea typeface="Arial" pitchFamily="34" charset="-122"/>
                 <a:cs typeface="Arial" pitchFamily="34" charset="-120"/>
               </a:rPr>
-              <a:t>– Submit project plan paragraph (working title + thesis sentence + 2 sources) by tomorrow.</a:t>
+              <a:t>Write topic on a sticky note + post on the wall under their chosen domain.</a:t>
             </a:r>
             <a:endParaRPr lang="en-US" sz="1200" dirty="0"/>
           </a:p>
